--- a/slides/Toan12/Slide_TOAN12_CD1_Bai1_T1-5.pptx
+++ b/slides/Toan12/Slide_TOAN12_CD1_Bai1_T1-5.pptx
@@ -3961,7 +3961,7 @@
                 </a:r>
                 <a:r>
                   <a:rPr lang="vi-VN"/>
-                  <a:t>V(X)=\sum(x_i-\mu)^2p_i=\sum x_i^2p_i-\mu^2</a:t>
+                  <a:t>V(X)=\sum(x_i−\mu)^2p_i=\sum x_i^2p_i−\mu^2</a:t>
                 </a:r>
               </a:p>
               <a:p>
